--- a/20260403_CENS_QuantumComputing.pptx
+++ b/20260403_CENS_QuantumComputing.pptx
@@ -12114,6 +12114,106 @@
           </a:prstGeom>
         </p:spPr>
       </p:pic>
+      <p:sp>
+        <p:nvSpPr>
+          <p:cNvPr id="2" name="TextBox 1">
+            <a:extLst>
+              <a:ext uri="{FF2B5EF4-FFF2-40B4-BE49-F238E27FC236}">
+                <a16:creationId xmlns:a16="http://schemas.microsoft.com/office/drawing/2014/main" id="{03A96F51-4CF6-4C21-8C79-8958D29DD94E}"/>
+              </a:ext>
+            </a:extLst>
+          </p:cNvPr>
+          <p:cNvSpPr txBox="1"/>
+          <p:nvPr/>
+        </p:nvSpPr>
+        <p:spPr>
+          <a:xfrm>
+            <a:off x="1349298" y="5140712"/>
+            <a:ext cx="7817004" cy="646331"/>
+          </a:xfrm>
+          <a:prstGeom prst="rect">
+            <a:avLst/>
+          </a:prstGeom>
+          <a:noFill/>
+        </p:spPr>
+        <p:txBody>
+          <a:bodyPr wrap="square" rtlCol="0">
+            <a:spAutoFit/>
+          </a:bodyPr>
+          <a:lstStyle/>
+          <a:p>
+            <a:pPr marL="285750" indent="-285750">
+              <a:buFont typeface="Arial" panose="020B0604020202020204" pitchFamily="34" charset="0"/>
+              <a:buChar char="•"/>
+            </a:pPr>
+            <a:r>
+              <a:rPr lang="en-US" dirty="0">
+                <a:solidFill>
+                  <a:srgbClr val="FF0000"/>
+                </a:solidFill>
+              </a:rPr>
+              <a:t>However,</a:t>
+            </a:r>
+            <a:r>
+              <a:rPr lang="ko-KR" altLang="en-US" dirty="0"/>
+              <a:t> </a:t>
+            </a:r>
+            <a:r>
+              <a:rPr lang="en-US" altLang="ko-KR" dirty="0"/>
+              <a:t>Jordan-Wigner</a:t>
+            </a:r>
+            <a:r>
+              <a:rPr lang="ko-KR" altLang="en-US" dirty="0"/>
+              <a:t> </a:t>
+            </a:r>
+            <a:r>
+              <a:rPr lang="en-US" altLang="ko-KR" dirty="0"/>
+              <a:t>transformation</a:t>
+            </a:r>
+            <a:r>
+              <a:rPr lang="ko-KR" altLang="en-US" dirty="0"/>
+              <a:t> </a:t>
+            </a:r>
+            <a:r>
+              <a:rPr lang="en-US" altLang="ko-KR" dirty="0"/>
+              <a:t>or</a:t>
+            </a:r>
+            <a:r>
+              <a:rPr lang="ko-KR" altLang="en-US" dirty="0"/>
+              <a:t> </a:t>
+            </a:r>
+            <a:r>
+              <a:rPr lang="en-US" altLang="ko-KR" dirty="0"/>
+              <a:t>one-hot-encoding</a:t>
+            </a:r>
+            <a:r>
+              <a:rPr lang="ko-KR" altLang="en-US" dirty="0"/>
+              <a:t> </a:t>
+            </a:r>
+            <a:r>
+              <a:rPr lang="en-US" altLang="ko-KR" dirty="0"/>
+              <a:t>is</a:t>
+            </a:r>
+            <a:r>
+              <a:rPr lang="ko-KR" altLang="en-US" dirty="0"/>
+              <a:t> </a:t>
+            </a:r>
+            <a:r>
+              <a:rPr lang="en-US" altLang="ko-KR" dirty="0"/>
+              <a:t>not</a:t>
+            </a:r>
+            <a:r>
+              <a:rPr lang="ko-KR" altLang="en-US" dirty="0"/>
+              <a:t> </a:t>
+            </a:r>
+            <a:r>
+              <a:rPr lang="en-US" altLang="ko-KR" dirty="0"/>
+              <a:t>resource efficient. </a:t>
+            </a:r>
+            <a:endParaRPr lang="en-US" dirty="0"/>
+          </a:p>
+        </p:txBody>
+      </p:sp>
     </p:spTree>
     <p:extLst>
       <p:ext uri="{BB962C8B-B14F-4D97-AF65-F5344CB8AC3E}">

--- a/20260403_CENS_QuantumComputing.pptx
+++ b/20260403_CENS_QuantumComputing.pptx
@@ -290,7 +290,7 @@
           <a:p>
             <a:fld id="{916B85E3-3F26-4931-9378-98579BCCDB13}" type="datetimeFigureOut">
               <a:rPr lang="ko-KR" altLang="en-US" smtClean="0"/>
-              <a:t>2026-03-26</a:t>
+              <a:t>2026-04-03</a:t>
             </a:fld>
             <a:endParaRPr lang="ko-KR" altLang="en-US"/>
           </a:p>
@@ -488,7 +488,7 @@
           <a:p>
             <a:fld id="{916B85E3-3F26-4931-9378-98579BCCDB13}" type="datetimeFigureOut">
               <a:rPr lang="ko-KR" altLang="en-US" smtClean="0"/>
-              <a:t>2026-03-26</a:t>
+              <a:t>2026-04-03</a:t>
             </a:fld>
             <a:endParaRPr lang="ko-KR" altLang="en-US"/>
           </a:p>
@@ -696,7 +696,7 @@
           <a:p>
             <a:fld id="{916B85E3-3F26-4931-9378-98579BCCDB13}" type="datetimeFigureOut">
               <a:rPr lang="ko-KR" altLang="en-US" smtClean="0"/>
-              <a:t>2026-03-26</a:t>
+              <a:t>2026-04-03</a:t>
             </a:fld>
             <a:endParaRPr lang="ko-KR" altLang="en-US"/>
           </a:p>
@@ -894,7 +894,7 @@
           <a:p>
             <a:fld id="{916B85E3-3F26-4931-9378-98579BCCDB13}" type="datetimeFigureOut">
               <a:rPr lang="ko-KR" altLang="en-US" smtClean="0"/>
-              <a:t>2026-03-26</a:t>
+              <a:t>2026-04-03</a:t>
             </a:fld>
             <a:endParaRPr lang="ko-KR" altLang="en-US"/>
           </a:p>
@@ -1169,7 +1169,7 @@
           <a:p>
             <a:fld id="{916B85E3-3F26-4931-9378-98579BCCDB13}" type="datetimeFigureOut">
               <a:rPr lang="ko-KR" altLang="en-US" smtClean="0"/>
-              <a:t>2026-03-26</a:t>
+              <a:t>2026-04-03</a:t>
             </a:fld>
             <a:endParaRPr lang="ko-KR" altLang="en-US"/>
           </a:p>
@@ -1434,7 +1434,7 @@
           <a:p>
             <a:fld id="{916B85E3-3F26-4931-9378-98579BCCDB13}" type="datetimeFigureOut">
               <a:rPr lang="ko-KR" altLang="en-US" smtClean="0"/>
-              <a:t>2026-03-26</a:t>
+              <a:t>2026-04-03</a:t>
             </a:fld>
             <a:endParaRPr lang="ko-KR" altLang="en-US"/>
           </a:p>
@@ -1846,7 +1846,7 @@
           <a:p>
             <a:fld id="{916B85E3-3F26-4931-9378-98579BCCDB13}" type="datetimeFigureOut">
               <a:rPr lang="ko-KR" altLang="en-US" smtClean="0"/>
-              <a:t>2026-03-26</a:t>
+              <a:t>2026-04-03</a:t>
             </a:fld>
             <a:endParaRPr lang="ko-KR" altLang="en-US"/>
           </a:p>
@@ -1987,7 +1987,7 @@
           <a:p>
             <a:fld id="{916B85E3-3F26-4931-9378-98579BCCDB13}" type="datetimeFigureOut">
               <a:rPr lang="ko-KR" altLang="en-US" smtClean="0"/>
-              <a:t>2026-03-26</a:t>
+              <a:t>2026-04-03</a:t>
             </a:fld>
             <a:endParaRPr lang="ko-KR" altLang="en-US"/>
           </a:p>
@@ -2100,7 +2100,7 @@
           <a:p>
             <a:fld id="{916B85E3-3F26-4931-9378-98579BCCDB13}" type="datetimeFigureOut">
               <a:rPr lang="ko-KR" altLang="en-US" smtClean="0"/>
-              <a:t>2026-03-26</a:t>
+              <a:t>2026-04-03</a:t>
             </a:fld>
             <a:endParaRPr lang="ko-KR" altLang="en-US"/>
           </a:p>
@@ -2411,7 +2411,7 @@
           <a:p>
             <a:fld id="{916B85E3-3F26-4931-9378-98579BCCDB13}" type="datetimeFigureOut">
               <a:rPr lang="ko-KR" altLang="en-US" smtClean="0"/>
-              <a:t>2026-03-26</a:t>
+              <a:t>2026-04-03</a:t>
             </a:fld>
             <a:endParaRPr lang="ko-KR" altLang="en-US"/>
           </a:p>
@@ -2699,7 +2699,7 @@
           <a:p>
             <a:fld id="{916B85E3-3F26-4931-9378-98579BCCDB13}" type="datetimeFigureOut">
               <a:rPr lang="ko-KR" altLang="en-US" smtClean="0"/>
-              <a:t>2026-03-26</a:t>
+              <a:t>2026-04-03</a:t>
             </a:fld>
             <a:endParaRPr lang="ko-KR" altLang="en-US"/>
           </a:p>
@@ -2940,7 +2940,7 @@
           <a:p>
             <a:fld id="{916B85E3-3F26-4931-9378-98579BCCDB13}" type="datetimeFigureOut">
               <a:rPr lang="ko-KR" altLang="en-US" smtClean="0"/>
-              <a:t>2026-03-26</a:t>
+              <a:t>2026-04-03</a:t>
             </a:fld>
             <a:endParaRPr lang="ko-KR" altLang="en-US"/>
           </a:p>
@@ -14950,7 +14950,15 @@
             </a:pPr>
             <a:r>
               <a:rPr lang="en-US" sz="2800" dirty="0"/>
-              <a:t>How to encode the physical basis into qubits ? How to convert Hamiltonian to Pauli matrices?</a:t>
+              <a:t>How to encode the physical basis into qubits </a:t>
+            </a:r>
+            <a:r>
+              <a:rPr lang="en-US" altLang="ko-KR" sz="2800" dirty="0"/>
+              <a:t>(encoding)</a:t>
+            </a:r>
+            <a:r>
+              <a:rPr lang="en-US" sz="2800" dirty="0"/>
+              <a:t>? </a:t>
             </a:r>
           </a:p>
           <a:p>
@@ -14960,7 +14968,7 @@
             </a:pPr>
             <a:r>
               <a:rPr lang="en-US" sz="2800" dirty="0"/>
-              <a:t>How to make a good ansatz of wave function in VQE? </a:t>
+              <a:t>How to convert Hamiltonian to Pauli matrices?</a:t>
             </a:r>
           </a:p>
           <a:p>
@@ -14970,7 +14978,7 @@
             </a:pPr>
             <a:r>
               <a:rPr lang="en-US" sz="2800" dirty="0"/>
-              <a:t>How to construct efficient quantum circuits ?</a:t>
+              <a:t>How to make a good ansatz of wave function in VQE? </a:t>
             </a:r>
           </a:p>
           <a:p>
@@ -14980,7 +14988,7 @@
             </a:pPr>
             <a:r>
               <a:rPr lang="en-US" sz="2800" dirty="0"/>
-              <a:t>How to remove noises in the quantum measurements? </a:t>
+              <a:t>How to construct efficient quantum circuits ?</a:t>
             </a:r>
           </a:p>
           <a:p>
@@ -14990,7 +14998,17 @@
             </a:pPr>
             <a:r>
               <a:rPr lang="en-US" sz="2800" dirty="0"/>
-              <a:t>Other quantum algorithms for nuclear physics?</a:t>
+              <a:t>How to remove noises in the quantum measurements? </a:t>
+            </a:r>
+          </a:p>
+          <a:p>
+            <a:pPr marL="285750" indent="-285750">
+              <a:buFont typeface="Arial" panose="020B0604020202020204" pitchFamily="34" charset="0"/>
+              <a:buChar char="•"/>
+            </a:pPr>
+            <a:r>
+              <a:rPr lang="en-US" sz="2800" dirty="0"/>
+              <a:t>What other quantum algorithms for nuclear physics?</a:t>
             </a:r>
           </a:p>
           <a:p>
